--- a/deliverables/저지종_원유_산업화_사례_발표_송영신목장.pptx
+++ b/deliverables/저지종_원유_산업화_사례_발표_송영신목장.pptx
@@ -514,7 +514,7 @@
           <a:p>
             <a:r>
               <a:rPr lang="en-US" dirty="0"/>
-              <a:t/>
+              <a:t>안녕하십니까. 송영신목장 원장이자 수의사인 하현제입니다. 오늘 저지종 젖소 산업 활성화를 위한 뜻깊은 자리에 발표자로 함께하게 되어 진심으로 감사드립니다. 저는 오늘 '저지종 원유를 어떻게 하나의 산업으로 만들 것인가', 즉 제품 생산부터 마케팅까지 저희 송영신목장이 걸어온 산업화 사례를 20분 동안 공유드리겠습니다.</a:t>
             </a:r>
             <a:endParaRPr lang="en-US" dirty="0"/>
           </a:p>
@@ -602,7 +602,7 @@
           <a:p>
             <a:r>
               <a:rPr lang="en-US" dirty="0"/>
-              <a:t/>
+              <a:t>마케팅과 판매는 자사몰 중심의 D2C 구조입니다. shop.a2jerseymilk.com은 단순한 판매 페이지가 아니라 브랜드 공식 플랫폼이자 모든 판매의 중심입니다. 소량·프리미엄 저지 원유에는 자사몰과 정기구독이 가장 잘 맞습니다. 정기구독으로 재구매를 극대화하고, 첫 1,000 고객을 확보해 객단가와 재구매율을 높입니다. 팜스토리 콘텐츠와 카카오채널 CRM으로 팬덤을 만들고, 카페·베이커리·프리미엄 식품관 같은 B2B로 채널을 넓힙니다. 브랜드와 고객 데이터를 직접 보유한다는 점이 D2C의 가장 큰 힘입니다.</a:t>
             </a:r>
             <a:endParaRPr lang="en-US" dirty="0"/>
           </a:p>
@@ -690,7 +690,7 @@
           <a:p>
             <a:r>
               <a:rPr lang="en-US" dirty="0"/>
-              <a:t/>
+              <a:t>여기에 6차산업화를 더합니다. 목장형 카페, 팜투어, 체험 프로그램으로 생산 현장 자체를 브랜드 경험 공간으로 만듭니다. 그동안 배운 교훈을 정리하면, 첫째 저지 원유의 가공적성이 제품 다각화의 핵심 동력이었고, 둘째 자사몰과 구독이 소량 프리미엄에 가장 맞는 채널이었으며, 셋째 순환농업 서사가 가격 프리미엄을 정당화했습니다. 물론 초기에는 소량 생산의 규모, 물류, 콜드체인 관리가 과제였습니다. 성과 수치는 아직 파일럿과 목표 기준임을 함께 말씀드립니다.</a:t>
             </a:r>
             <a:endParaRPr lang="en-US" dirty="0"/>
           </a:p>
@@ -778,7 +778,7 @@
           <a:p>
             <a:r>
               <a:rPr lang="en-US" dirty="0"/>
-              <a:t/>
+              <a:t>이제 저지종 산업 활성화를 위한 다섯 가지 제언을 드리겠습니다. 첫째, 저지 A2A2 개량과 유전능력평가를 연계해야 합니다. 이는 오늘 함께하신 축산원과 경기도의 사업과 바로 연결됩니다. 둘째, 소규모 유가공과 가공적성 활용을 지원하는 산업화 인프라가 필요합니다. 셋째, D2C 자사몰과 정기구독, 6차산업 판로를 지원해야 합니다. 넷째, 순환농업·저탄소·동물복지 인증과 연계한 저지 프리미엄 표준을 만들어야 합니다. 다섯째, 산·학·연·관 협력 클러스터로 지식과 판로를 함께 나눠야 합니다.</a:t>
             </a:r>
             <a:endParaRPr lang="en-US" dirty="0"/>
           </a:p>
@@ -866,7 +866,7 @@
           <a:p>
             <a:r>
               <a:rPr lang="en-US" dirty="0"/>
-              <a:t/>
+              <a:t>마무리하겠습니다. 저지종의 미래는 많이가 아니라 다르게에 있습니다. 소량·고품질을 가공과 브랜드, D2C로 산업화하는 것, 그리고 송영신목장이 그 실증 사례가 되고자 합니다. 오늘 이 자리가 저지종 산업이 함께 도약하는 계기가 되기를 바랍니다. 경청해 주셔서 감사합니다.</a:t>
             </a:r>
             <a:endParaRPr lang="en-US" dirty="0"/>
           </a:p>
@@ -954,7 +954,7 @@
           <a:p>
             <a:r>
               <a:rPr lang="en-US" dirty="0"/>
-              <a:t/>
+              <a:t>먼저 간단히 소개드리겠습니다. 저는 수의사이자 축산 바이오테크와 환경기술을 함께 다루며, 유전자에서 사양·환경·데이터·식품·탄소까지 이어지는 통합 농축산 생태계를 설계해 왔습니다. 송영신목장은 단순히 우유를 생산하는 목장이 아니라, 저지 원유의 생산·가공·브랜드·판매를 하나로 잇는 6차산업 목장입니다. 자연 조사료인 건초 중심 사양에 A2 유전형을 더했고, D2O 순환농업으로 분뇨를 다시 흙으로 되돌립니다. 이 모든 것이 저희 그룹의 Genetics 수정란 사업, 한국동물병원, D2O 환경기술과 유기적으로 연결되어 있습니다.</a:t>
             </a:r>
             <a:endParaRPr lang="en-US" dirty="0"/>
           </a:p>
@@ -1042,7 +1042,7 @@
           <a:p>
             <a:r>
               <a:rPr lang="en-US" dirty="0"/>
-              <a:t/>
+              <a:t>오늘 발표는 크게 여섯 부분으로 말씀드리겠습니다. 왜 저지종인가, 순환농업 기반, 산업화 전략, 제품과 제조공정, 브랜드와 마케팅, 그리고 마지막으로 저지종 산업 활성화를 위한 제언 순입니다.</a:t>
             </a:r>
             <a:endParaRPr lang="en-US" dirty="0"/>
           </a:p>
@@ -1130,7 +1130,7 @@
           <a:p>
             <a:r>
               <a:rPr lang="en-US" dirty="0"/>
-              <a:t/>
+              <a:t>먼저 왜 저지종인가입니다. 저지 원유의 가장 큰 강점은 유지방과 유단백이 풍부한 높은 유고형분입니다. 이 덕분에 요거트, 카이막, 치즈 같은 가공에 적성이 매우 뛰어납니다. 황금빛의 진하고 크리미한 풍미도 소비자에게 즉각적인 차별성을 줍니다. 여기에 A2A2 유전형을 확보하면 A2 우유로 프리미엄 포지셔닝이 가능합니다. 다만 현실적인 문제의식도 분명합니다. 저지는 홀스타인보다 산유량이 적고 원유 원가가 높습니다. 그래서 원유를 그대로 파는 방식으로는 수익성에 한계가 있습니다. 결론은 명확합니다. 저지는 대량·저가 경쟁이 아니라, 가공과 브랜드를 통한 산업화로 승부해야 합니다.</a:t>
             </a:r>
             <a:endParaRPr lang="en-US" dirty="0"/>
           </a:p>
@@ -1218,7 +1218,7 @@
           <a:p>
             <a:r>
               <a:rPr lang="en-US" dirty="0"/>
-              <a:t/>
+              <a:t>저희 산업화의 출발점은 순환농업입니다. 건강한 흙에서 건강한 풀, 건강한 소, 좋은 우유, 그리고 건강한 사람으로 이어지는 Soil to Soul 철학입니다. 건초 중심 사양으로 원유의 자연성과 풍미를 확보하고, D2O 순환농업으로 분뇨를 베딩과 힐링퇴비로 만들어 토양으로 되돌립니다. 이 저탄소·동물복지 스토리는 단순한 구호가 아니라 프리미엄 가격을 정당화하는 실질적인 근거가 됩니다. 즉 품질과 브랜드 서사를 동시에 확보하는 구조입니다.</a:t>
             </a:r>
             <a:endParaRPr lang="en-US" dirty="0"/>
           </a:p>
@@ -1306,7 +1306,7 @@
           <a:p>
             <a:r>
               <a:rPr lang="en-US" dirty="0"/>
-              <a:t/>
+              <a:t>그래서 저희의 산업화 전략은 원유를 파는 것이 아니라 가치사슬 전체를 설계하는 것입니다. 생산에서 가공, 브랜드, 채널, 그리고 6차산업까지 다섯 단계를 하나로 연결합니다. 핵심은 소량·고품질이라는 저지의 특성을 약점이 아니라 프리미엄의 무기로 바꾸는 것입니다. 이렇게 하면 원유 1리터의 부가가치를 몇 배로 끌어올릴 수 있습니다.</a:t>
             </a:r>
             <a:endParaRPr lang="en-US" dirty="0"/>
           </a:p>
@@ -1394,7 +1394,7 @@
           <a:p>
             <a:r>
               <a:rPr lang="en-US" dirty="0"/>
-              <a:t/>
+              <a:t>제품 라인업입니다. 플래그십은 A2 저지 건초우유로, 브랜드의 얼굴 역할을 합니다. 높은 고형분을 살린 A2 요거트와 그릭요거트는 되직하고 진한 식감이 특징입니다. 특히 카이막은 저지의 고유고형분을 그대로 살린 고급 유크림 별미로, 저지가 아니면 만들기 어려운 차별화 제품입니다. 여기에 밀크티와 아이스크림으로 일상과 디저트 접점을 넓혀 갑니다.</a:t>
             </a:r>
             <a:endParaRPr lang="en-US" dirty="0"/>
           </a:p>
@@ -1482,7 +1482,7 @@
           <a:p>
             <a:r>
               <a:rPr lang="en-US" dirty="0"/>
-              <a:t/>
+              <a:t>품질은 표준화된 공정으로 관리합니다. 원유는 균질화와 75도 20초 저온 살균, 냉각, 충전, 포장을 거치며, 판형 열교환기와 APV 균질기를 사용해 신선도와 풍미를 유지합니다. 영양성분을 보시면 100밀리리터 기준 열량 92.64킬로칼로리에 단백질 4.59그램, 유지방 6.0그램으로, 높은 단백질과 유지방이 저지 원유의 강점을 그대로 보여줍니다.</a:t>
             </a:r>
             <a:endParaRPr lang="en-US" dirty="0"/>
           </a:p>
@@ -1570,7 +1570,7 @@
           <a:p>
             <a:r>
               <a:rPr lang="en-US" dirty="0"/>
-              <a:t/>
+              <a:t>브랜드는 A2 Jersey Hay Milk입니다. 핵심 메시지는 흙에서 영혼까지, Soil to Soul입니다. A2 단백질, 건초우유, 저탄소 순환농업이라는 세 가지 자산을 프리미엄·자연·동물복지 서사로 엮었습니다. 표시·광고에서는 의학적 치료 표현을 배제하고 검증된 시험값만 사용해 소비자 신뢰를 지킵니다.</a:t>
             </a:r>
             <a:endParaRPr lang="en-US" dirty="0"/>
           </a:p>

--- a/deliverables/저지종_원유_산업화_사례_발표_송영신목장.pptx
+++ b/deliverables/저지종_원유_산업화_사례_발표_송영신목장.pptx
@@ -514,7 +514,7 @@
           <a:p>
             <a:r>
               <a:rPr lang="en-US" dirty="0"/>
-              <a:t>안녕하십니까. 송영신목장 원장이자 수의사인 하현제입니다. 오늘 저지종 젖소 산업 활성화를 위한 뜻깊은 자리에 발표자로 함께하게 되어 진심으로 감사드립니다. 저는 오늘 '저지종 원유를 어떻게 하나의 산업으로 만들 것인가', 즉 제품 생산부터 마케팅까지 저희 송영신목장이 걸어온 산업화 사례를 20분 동안 공유드리겠습니다.</a:t>
+              <a:t>안녕하십니까. 송영신목장의 수의사 하현제입니다. 오늘 저지종 젖소 산업 활성화를 위한 뜻깊은 자리에 발표자로 함께하게 되어 진심으로 감사드립니다. 저는 오늘 '저지종 원유를 어떻게 하나의 산업으로 만들 것인가', 즉 제품 생산부터 마케팅까지 저희 송영신목장이 걸어온 산업화 사례를 20분 동안 공유드리겠습니다.</a:t>
             </a:r>
             <a:endParaRPr lang="en-US" dirty="0"/>
           </a:p>
@@ -954,7 +954,7 @@
           <a:p>
             <a:r>
               <a:rPr lang="en-US" dirty="0"/>
-              <a:t>먼저 간단히 소개드리겠습니다. 저는 수의사이자 축산 바이오테크와 환경기술을 함께 다루며, 유전자에서 사양·환경·데이터·식품·탄소까지 이어지는 통합 농축산 생태계를 설계해 왔습니다. 송영신목장은 단순히 우유를 생산하는 목장이 아니라, 저지 원유의 생산·가공·브랜드·판매를 하나로 잇는 6차산업 목장입니다. 자연 조사료인 건초 중심 사양에 A2 유전형을 더했고, D2O 순환농업으로 분뇨를 다시 흙으로 되돌립니다. 이 모든 것이 저희 그룹의 Genetics 수정란 사업, 한국동물병원, D2O 환경기술과 유기적으로 연결되어 있습니다.</a:t>
+              <a:t>먼저 간단히 소개드리겠습니다. 저는 송영신목장에서 저지 젖소를 사육하는 수의사입니다. 송영신목장은 단순히 우유를 생산하는 목장이 아니라, 저지 원유의 생산·가공·브랜드·판매를 하나로 잇는 6차산업 목장입니다. 원유 생산부터 제품 가공, 브랜드, 판매까지 직접 운영하고 있습니다. 자연 조사료인 건초 중심 사양에 A2 유전형을 더했고, 순환농업으로 분뇨를 다시 흙으로 되돌립니다.</a:t>
             </a:r>
             <a:endParaRPr lang="en-US" dirty="0"/>
           </a:p>
@@ -2169,7 +2169,7 @@
                 <a:ea typeface="Malgun Gothic" pitchFamily="34" charset="-122"/>
                 <a:cs typeface="Malgun Gothic" pitchFamily="34" charset="-120"/>
               </a:rPr>
-              <a:t>송영신목장 하현제 원장</a:t>
+              <a:t>하현제 수의사</a:t>
             </a:r>
             <a:endParaRPr lang="en-US" sz="1800" dirty="0"/>
           </a:p>
@@ -2208,7 +2208,7 @@
                 <a:ea typeface="Malgun Gothic" pitchFamily="34" charset="-122"/>
                 <a:cs typeface="Malgun Gothic" pitchFamily="34" charset="-120"/>
               </a:rPr>
-              <a:t>수의사 · 축산 바이오테크 · 환경기술 · 순환농업 시스템 설계</a:t>
+              <a:t>송영신목장</a:t>
             </a:r>
             <a:endParaRPr lang="en-US" sz="1200" dirty="0"/>
           </a:p>
@@ -3043,7 +3043,7 @@
                 <a:ea typeface="Malgun Gothic" pitchFamily="34" charset="-122"/>
                 <a:cs typeface="Malgun Gothic" pitchFamily="34" charset="-120"/>
               </a:rPr>
-              <a:t>저지종 젖소 산업 활성화를 위한 국제 심포지엄  ·  송영신목장 하현제 원장</a:t>
+              <a:t>저지종 젖소 산업 활성화를 위한 국제 심포지엄  ·  하현제 수의사</a:t>
             </a:r>
             <a:endParaRPr lang="en-US" sz="900" dirty="0"/>
           </a:p>
@@ -3953,7 +3953,7 @@
                 <a:ea typeface="Malgun Gothic" pitchFamily="34" charset="-122"/>
                 <a:cs typeface="Malgun Gothic" pitchFamily="34" charset="-120"/>
               </a:rPr>
-              <a:t>저지종 젖소 산업 활성화를 위한 국제 심포지엄  ·  송영신목장 하현제 원장</a:t>
+              <a:t>저지종 젖소 산업 활성화를 위한 국제 심포지엄  ·  하현제 수의사</a:t>
             </a:r>
             <a:endParaRPr lang="en-US" sz="900" dirty="0"/>
           </a:p>
@@ -4946,7 +4946,7 @@
                 <a:ea typeface="Malgun Gothic" pitchFamily="34" charset="-122"/>
                 <a:cs typeface="Malgun Gothic" pitchFamily="34" charset="-120"/>
               </a:rPr>
-              <a:t>저지종 젖소 산업 활성화를 위한 국제 심포지엄  ·  송영신목장 하현제 원장</a:t>
+              <a:t>저지종 젖소 산업 활성화를 위한 국제 심포지엄  ·  하현제 수의사</a:t>
             </a:r>
             <a:endParaRPr lang="en-US" sz="900" dirty="0"/>
           </a:p>
@@ -5340,7 +5340,7 @@
                 <a:ea typeface="Malgun Gothic" pitchFamily="34" charset="-122"/>
                 <a:cs typeface="Malgun Gothic" pitchFamily="34" charset="-120"/>
               </a:rPr>
-              <a:t>송영신목장  ·  하현제 원장   |   shop.a2jerseymilk.com</a:t>
+              <a:t>하현제 수의사  ·  송영신목장   |   shop.a2jerseymilk.com</a:t>
             </a:r>
             <a:endParaRPr lang="en-US" sz="1300" dirty="0"/>
           </a:p>
@@ -5570,7 +5570,7 @@
                 <a:ea typeface="Malgun Gothic" pitchFamily="34" charset="-122"/>
                 <a:cs typeface="Malgun Gothic" pitchFamily="34" charset="-120"/>
               </a:rPr>
-              <a:t>하현제 원장</a:t>
+              <a:t>하현제 수의사</a:t>
             </a:r>
             <a:endParaRPr lang="en-US" sz="2600" dirty="0"/>
           </a:p>
@@ -5609,7 +5609,7 @@
                 <a:ea typeface="Malgun Gothic" pitchFamily="34" charset="-122"/>
                 <a:cs typeface="Malgun Gothic" pitchFamily="34" charset="-120"/>
               </a:rPr>
-              <a:t>송영신목장 · Genetics · D2O</a:t>
+              <a:t>송영신목장</a:t>
             </a:r>
             <a:endParaRPr lang="en-US" sz="1400" dirty="0"/>
           </a:p>
@@ -5652,7 +5652,7 @@
                 <a:ea typeface="Malgun Gothic" pitchFamily="34" charset="-122"/>
                 <a:cs typeface="Malgun Gothic" pitchFamily="34" charset="-120"/>
               </a:rPr>
-              <a:t>수의사 · 축산 바이오테크 전문가</a:t>
+              <a:t>송영신목장에서 저지 젖소를 사육하는 수의사</a:t>
             </a:r>
             <a:endParaRPr lang="en-US" sz="1350" dirty="0"/>
           </a:p>
@@ -5673,7 +5673,7 @@
                 <a:ea typeface="Malgun Gothic" pitchFamily="34" charset="-122"/>
                 <a:cs typeface="Malgun Gothic" pitchFamily="34" charset="-120"/>
               </a:rPr>
-              <a:t>환경기술 개발 · 순환농업 시스템 설계</a:t>
+              <a:t>원유 생산부터 제품 가공 · 브랜드 · 판매까지 직접 운영</a:t>
             </a:r>
             <a:endParaRPr lang="en-US" sz="1350" dirty="0"/>
           </a:p>
@@ -5694,7 +5694,7 @@
                 <a:ea typeface="Malgun Gothic" pitchFamily="34" charset="-122"/>
                 <a:cs typeface="Malgun Gothic" pitchFamily="34" charset="-120"/>
               </a:rPr>
-              <a:t>유전자 → 사양 → 환경 → 데이터 → 식품 → 탄소를 잇는 통합 생태계 설계</a:t>
+              <a:t>건초 사양 · 순환농업을 기반으로 한 6차산업 실천</a:t>
             </a:r>
             <a:endParaRPr lang="en-US" sz="1350" dirty="0"/>
           </a:p>
@@ -6133,7 +6133,7 @@
                 <a:ea typeface="Malgun Gothic" pitchFamily="34" charset="-122"/>
                 <a:cs typeface="Malgun Gothic" pitchFamily="34" charset="-120"/>
               </a:rPr>
-              <a:t>저지종 젖소 산업 활성화를 위한 국제 심포지엄  ·  송영신목장 하현제 원장</a:t>
+              <a:t>저지종 젖소 산업 활성화를 위한 국제 심포지엄  ·  하현제 수의사</a:t>
             </a:r>
             <a:endParaRPr lang="en-US" sz="900" dirty="0"/>
           </a:p>
@@ -7305,7 +7305,7 @@
                 <a:ea typeface="Malgun Gothic" pitchFamily="34" charset="-122"/>
                 <a:cs typeface="Malgun Gothic" pitchFamily="34" charset="-120"/>
               </a:rPr>
-              <a:t>저지종 젖소 산업 활성화를 위한 국제 심포지엄  ·  송영신목장 하현제 원장</a:t>
+              <a:t>저지종 젖소 산업 활성화를 위한 국제 심포지엄  ·  하현제 수의사</a:t>
             </a:r>
             <a:endParaRPr lang="en-US" sz="900" dirty="0"/>
           </a:p>
@@ -8039,7 +8039,7 @@
                 <a:ea typeface="Malgun Gothic" pitchFamily="34" charset="-122"/>
                 <a:cs typeface="Malgun Gothic" pitchFamily="34" charset="-120"/>
               </a:rPr>
-              <a:t>저지종 젖소 산업 활성화를 위한 국제 심포지엄  ·  송영신목장 하현제 원장</a:t>
+              <a:t>저지종 젖소 산업 활성화를 위한 국제 심포지엄  ·  하현제 수의사</a:t>
             </a:r>
             <a:endParaRPr lang="en-US" sz="900" dirty="0"/>
           </a:p>
@@ -9165,7 +9165,7 @@
                 <a:ea typeface="Malgun Gothic" pitchFamily="34" charset="-122"/>
                 <a:cs typeface="Malgun Gothic" pitchFamily="34" charset="-120"/>
               </a:rPr>
-              <a:t>저지종 젖소 산업 활성화를 위한 국제 심포지엄  ·  송영신목장 하현제 원장</a:t>
+              <a:t>저지종 젖소 산업 활성화를 위한 국제 심포지엄  ·  하현제 수의사</a:t>
             </a:r>
             <a:endParaRPr lang="en-US" sz="900" dirty="0"/>
           </a:p>
@@ -10432,7 +10432,7 @@
                 <a:ea typeface="Malgun Gothic" pitchFamily="34" charset="-122"/>
                 <a:cs typeface="Malgun Gothic" pitchFamily="34" charset="-120"/>
               </a:rPr>
-              <a:t>저지종 젖소 산업 활성화를 위한 국제 심포지엄  ·  송영신목장 하현제 원장</a:t>
+              <a:t>저지종 젖소 산업 활성화를 위한 국제 심포지엄  ·  하현제 수의사</a:t>
             </a:r>
             <a:endParaRPr lang="en-US" sz="900" dirty="0"/>
           </a:p>
@@ -11264,7 +11264,7 @@
                 <a:ea typeface="Malgun Gothic" pitchFamily="34" charset="-122"/>
                 <a:cs typeface="Malgun Gothic" pitchFamily="34" charset="-120"/>
               </a:rPr>
-              <a:t>저지종 젖소 산업 활성화를 위한 국제 심포지엄  ·  송영신목장 하현제 원장</a:t>
+              <a:t>저지종 젖소 산업 활성화를 위한 국제 심포지엄  ·  하현제 수의사</a:t>
             </a:r>
             <a:endParaRPr lang="en-US" sz="900" dirty="0"/>
           </a:p>
@@ -12730,7 +12730,7 @@
                 <a:ea typeface="Malgun Gothic" pitchFamily="34" charset="-122"/>
                 <a:cs typeface="Malgun Gothic" pitchFamily="34" charset="-120"/>
               </a:rPr>
-              <a:t>저지종 젖소 산업 활성화를 위한 국제 심포지엄  ·  송영신목장 하현제 원장</a:t>
+              <a:t>저지종 젖소 산업 활성화를 위한 국제 심포지엄  ·  하현제 수의사</a:t>
             </a:r>
             <a:endParaRPr lang="en-US" sz="900" dirty="0"/>
           </a:p>
@@ -13405,7 +13405,7 @@
                 <a:ea typeface="Malgun Gothic" pitchFamily="34" charset="-122"/>
                 <a:cs typeface="Malgun Gothic" pitchFamily="34" charset="-120"/>
               </a:rPr>
-              <a:t>저지종 젖소 산업 활성화를 위한 국제 심포지엄  ·  송영신목장 하현제 원장</a:t>
+              <a:t>저지종 젖소 산업 활성화를 위한 국제 심포지엄  ·  하현제 수의사</a:t>
             </a:r>
             <a:endParaRPr lang="en-US" sz="900" dirty="0"/>
           </a:p>

--- a/deliverables/저지종_원유_산업화_사례_발표_송영신목장.pptx
+++ b/deliverables/저지종_원유_산업화_사례_발표_송영신목장.pptx
@@ -6094,7 +6094,7 @@
                 <a:ea typeface="Malgun Gothic" pitchFamily="34" charset="-122"/>
                 <a:cs typeface="Malgun Gothic" pitchFamily="34" charset="-120"/>
               </a:rPr>
-              <a:t>Genetics(수정란) · 한국동물병원 · D2O 환경기술과 연결</a:t>
+              <a:t>Genetics(수정란) · 고려동물병원 · D2O 환경기술과 연결</a:t>
             </a:r>
             <a:endParaRPr lang="en-US" sz="1250" dirty="0"/>
           </a:p>
